--- a/.lessons/58 Backend Product And Related Features/26 Product Variant item- Show created data in datatable/1.pptx
+++ b/.lessons/58 Backend Product And Related Features/26 Product Variant item- Show created data in datatable/1.pptx
@@ -6,8 +6,13 @@
   </p:sldMasterIdLst>
   <p:sldIdLst>
     <p:sldId id="413" r:id="rId2"/>
-    <p:sldId id="414" r:id="rId3"/>
-    <p:sldId id="400" r:id="rId4"/>
+    <p:sldId id="415" r:id="rId3"/>
+    <p:sldId id="416" r:id="rId4"/>
+    <p:sldId id="417" r:id="rId5"/>
+    <p:sldId id="418" r:id="rId6"/>
+    <p:sldId id="414" r:id="rId7"/>
+    <p:sldId id="419" r:id="rId8"/>
+    <p:sldId id="400" r:id="rId9"/>
   </p:sldIdLst>
   <p:sldSz cx="12192000" cy="6858000"/>
   <p:notesSz cx="6858000" cy="9144000"/>
@@ -114,6 +119,34 @@
 </p:presentation>
 </file>
 
+<file path=ppt/ink/ink1.xml><?xml version="1.0" encoding="utf-8"?>
+<inkml:ink xmlns:inkml="http://www.w3.org/2003/InkML">
+  <inkml:definitions>
+    <inkml:context xml:id="ctx0">
+      <inkml:inkSource xml:id="inkSrc0">
+        <inkml:traceFormat>
+          <inkml:channel name="X" type="integer" min="-2.14748E9" max="2.14748E9" units="cm"/>
+          <inkml:channel name="Y" type="integer" min="-2.14748E9" max="2.14748E9" units="cm"/>
+          <inkml:channel name="F" type="integer" max="32767" units="dev"/>
+        </inkml:traceFormat>
+        <inkml:channelProperties>
+          <inkml:channelProperty channel="X" name="resolution" value="1000" units="1/cm"/>
+          <inkml:channelProperty channel="Y" name="resolution" value="1000" units="1/cm"/>
+          <inkml:channelProperty channel="F" name="resolution" value="0" units="1/dev"/>
+        </inkml:channelProperties>
+      </inkml:inkSource>
+      <inkml:timestamp xml:id="ts0" timeString="2025-10-09T08:28:42.563"/>
+    </inkml:context>
+    <inkml:brush xml:id="br0">
+      <inkml:brushProperty name="width" value="0.035" units="cm"/>
+      <inkml:brushProperty name="height" value="0.035" units="cm"/>
+      <inkml:brushProperty name="color" value="#E71224"/>
+    </inkml:brush>
+  </inkml:definitions>
+  <inkml:trace contextRef="#ctx0" brushRef="#br0">3671 185 24575,'-1120'0'0,"1035"-4"0,0-4 0,-83-20 0,83 13 0,-173-10 0,208 24 0,-1-2 0,1-2 0,-64-16 0,36 5 0,0 4 0,0 3 0,-113 1 0,148 7 0,-57-10 0,-39-2 0,51 11 0,16 0 0,0 2 0,-98 15 0,153-12 0,1 0 0,0 2 0,0 0 0,0 1 0,1 0 0,-1 1 0,2 1 0,-1 1 0,1 0 0,0 1 0,1 0 0,0 1 0,1 0 0,0 1 0,1 1 0,0 0 0,1 0 0,0 1 0,1 0 0,1 1 0,0 0 0,1 0 0,1 1 0,-6 18 0,0 31 0,3 0 0,3 0 0,3 118 0,4-148 0,-1 1633 0,-4-1589 0,-4-1 0,-18 83 0,-4 27 0,10-28 0,0-3 0,-1 192 0,19-311 0,-9 58 0,5-55 0,-1 48 0,6-10 0,4 145 0,-1-208 0,1-1 0,0 0 0,1 0 0,1-1 0,0 1 0,1-1 0,0 0 0,2 0 0,-1-1 0,2 0 0,16 21 0,11 6 0,1-1 0,44 35 0,-4-3 0,-37-33 0,2-1 0,75 52 0,-94-75 0,0 0 0,2-2 0,-1-1 0,2 0 0,-1-2 0,1-1 0,39 7 0,39 3 0,11 3 0,199 9 0,228-33 0,-491-2 0,0-2 0,-1-3 0,50-15 0,31-7 0,24-13 0,-119 32 0,1 1 0,0 2 0,76-9 0,112 13 0,44-3 0,-80 1 0,-37 4 0,25-21 0,-155 22 0,-1-2 0,0 0 0,0-1 0,0-2 0,38-18 0,93-63 0,-137 79 0,8-4 0,-1-1 0,-1-1 0,-1-1 0,0-1 0,-1-1 0,-1-1 0,-1 0 0,0-1 0,-2-1 0,-1-1 0,0 0 0,-2-1 0,18-45 0,89-262 0,-106 289 0,-2-1 0,-2-1 0,6-73 0,-9-137 0,-6 153 0,16-128 0,18-109 0,33-190 0,-42 370 0,14-141 0,-27 240 0,33-95 0,-14 55 0,-21 64 0,-1-1 0,-3 0 0,-1-1 0,-1 0 0,-2-40 0,-1 30 0,0 25 0,-1-1 0,-3-31 0,2 48 0,0-1 0,-1 1 0,0 0 0,0 0 0,0 0 0,0 0 0,-1 0 0,0 1 0,0-1 0,-1 1 0,1 0 0,-1 0 0,-6-5 0,-43-36 0,-2 2 0,-66-39 0,35 25 0,36 26 0,-61-27 0,69 38 0,1-1 0,1-3 0,-42-32 0,48 28-273,-1 2 0,-1 1 0,-1 2 0,-75-35 0,91 51-6553</inkml:trace>
+</inkml:ink>
+</file>
+
 <file path=ppt/slideLayouts/slideLayout1.xml><?xml version="1.0" encoding="utf-8"?>
 <p:sldLayout xmlns:a="http://schemas.openxmlformats.org/drawingml/2006/main" xmlns:r="http://schemas.openxmlformats.org/officeDocument/2006/relationships" xmlns:p="http://schemas.openxmlformats.org/presentationml/2006/main" type="title" preserve="1">
   <p:cSld name="Title Slide">
@@ -261,7 +294,7 @@
           <a:p>
             <a:fld id="{3E102D2E-813C-461C-9963-687A650C48C0}" type="datetimeFigureOut">
               <a:rPr lang="en-US" smtClean="0"/>
-              <a:t>6/26/2025</a:t>
+              <a:t>10/9/2025</a:t>
             </a:fld>
             <a:endParaRPr lang="en-US"/>
           </a:p>
@@ -459,7 +492,7 @@
           <a:p>
             <a:fld id="{3E102D2E-813C-461C-9963-687A650C48C0}" type="datetimeFigureOut">
               <a:rPr lang="en-US" smtClean="0"/>
-              <a:t>6/26/2025</a:t>
+              <a:t>10/9/2025</a:t>
             </a:fld>
             <a:endParaRPr lang="en-US"/>
           </a:p>
@@ -667,7 +700,7 @@
           <a:p>
             <a:fld id="{3E102D2E-813C-461C-9963-687A650C48C0}" type="datetimeFigureOut">
               <a:rPr lang="en-US" smtClean="0"/>
-              <a:t>6/26/2025</a:t>
+              <a:t>10/9/2025</a:t>
             </a:fld>
             <a:endParaRPr lang="en-US"/>
           </a:p>
@@ -865,7 +898,7 @@
           <a:p>
             <a:fld id="{3E102D2E-813C-461C-9963-687A650C48C0}" type="datetimeFigureOut">
               <a:rPr lang="en-US" smtClean="0"/>
-              <a:t>6/26/2025</a:t>
+              <a:t>10/9/2025</a:t>
             </a:fld>
             <a:endParaRPr lang="en-US"/>
           </a:p>
@@ -1140,7 +1173,7 @@
           <a:p>
             <a:fld id="{3E102D2E-813C-461C-9963-687A650C48C0}" type="datetimeFigureOut">
               <a:rPr lang="en-US" smtClean="0"/>
-              <a:t>6/26/2025</a:t>
+              <a:t>10/9/2025</a:t>
             </a:fld>
             <a:endParaRPr lang="en-US"/>
           </a:p>
@@ -1405,7 +1438,7 @@
           <a:p>
             <a:fld id="{3E102D2E-813C-461C-9963-687A650C48C0}" type="datetimeFigureOut">
               <a:rPr lang="en-US" smtClean="0"/>
-              <a:t>6/26/2025</a:t>
+              <a:t>10/9/2025</a:t>
             </a:fld>
             <a:endParaRPr lang="en-US"/>
           </a:p>
@@ -1817,7 +1850,7 @@
           <a:p>
             <a:fld id="{3E102D2E-813C-461C-9963-687A650C48C0}" type="datetimeFigureOut">
               <a:rPr lang="en-US" smtClean="0"/>
-              <a:t>6/26/2025</a:t>
+              <a:t>10/9/2025</a:t>
             </a:fld>
             <a:endParaRPr lang="en-US"/>
           </a:p>
@@ -1958,7 +1991,7 @@
           <a:p>
             <a:fld id="{3E102D2E-813C-461C-9963-687A650C48C0}" type="datetimeFigureOut">
               <a:rPr lang="en-US" smtClean="0"/>
-              <a:t>6/26/2025</a:t>
+              <a:t>10/9/2025</a:t>
             </a:fld>
             <a:endParaRPr lang="en-US"/>
           </a:p>
@@ -2071,7 +2104,7 @@
           <a:p>
             <a:fld id="{3E102D2E-813C-461C-9963-687A650C48C0}" type="datetimeFigureOut">
               <a:rPr lang="en-US" smtClean="0"/>
-              <a:t>6/26/2025</a:t>
+              <a:t>10/9/2025</a:t>
             </a:fld>
             <a:endParaRPr lang="en-US"/>
           </a:p>
@@ -2382,7 +2415,7 @@
           <a:p>
             <a:fld id="{3E102D2E-813C-461C-9963-687A650C48C0}" type="datetimeFigureOut">
               <a:rPr lang="en-US" smtClean="0"/>
-              <a:t>6/26/2025</a:t>
+              <a:t>10/9/2025</a:t>
             </a:fld>
             <a:endParaRPr lang="en-US"/>
           </a:p>
@@ -2670,7 +2703,7 @@
           <a:p>
             <a:fld id="{3E102D2E-813C-461C-9963-687A650C48C0}" type="datetimeFigureOut">
               <a:rPr lang="en-US" smtClean="0"/>
-              <a:t>6/26/2025</a:t>
+              <a:t>10/9/2025</a:t>
             </a:fld>
             <a:endParaRPr lang="en-US"/>
           </a:p>
@@ -2911,7 +2944,7 @@
           <a:p>
             <a:fld id="{3E102D2E-813C-461C-9963-687A650C48C0}" type="datetimeFigureOut">
               <a:rPr lang="en-US" smtClean="0"/>
-              <a:t>6/26/2025</a:t>
+              <a:t>10/9/2025</a:t>
             </a:fld>
             <a:endParaRPr lang="en-US"/>
           </a:p>
@@ -3369,21 +3402,54 @@
               <a:buNone/>
             </a:pPr>
             <a:r>
-              <a:rPr kumimoji="0" lang="en-US" altLang="en-US" sz="1300" b="0" i="0" u="none" strike="noStrike" cap="none" normalizeH="0" baseline="0">
-                <a:ln>
-                  <a:noFill/>
-                </a:ln>
-                <a:solidFill>
-                  <a:schemeClr val="tx1"/>
-                </a:solidFill>
-                <a:effectLst/>
+              <a:rPr lang="en-US" altLang="en-US" sz="1300">
                 <a:latin typeface="Arial" panose="020B0604020202020204" pitchFamily="34" charset="0"/>
               </a:rPr>
-              <a:t>.</a:t>
-            </a:r>
-          </a:p>
-        </p:txBody>
-      </p:sp>
+              <a:t>app\Models\ProductVariantItem.php</a:t>
+            </a:r>
+            <a:endParaRPr kumimoji="0" lang="en-US" altLang="en-US" sz="1300" b="0" i="0" u="none" strike="noStrike" cap="none" normalizeH="0" baseline="0">
+              <a:ln>
+                <a:noFill/>
+              </a:ln>
+              <a:solidFill>
+                <a:schemeClr val="tx1"/>
+              </a:solidFill>
+              <a:effectLst/>
+              <a:latin typeface="Arial" panose="020B0604020202020204" pitchFamily="34" charset="0"/>
+            </a:endParaRPr>
+          </a:p>
+        </p:txBody>
+      </p:sp>
+      <p:pic>
+        <p:nvPicPr>
+          <p:cNvPr id="4" name="Picture 3">
+            <a:extLst>
+              <a:ext uri="{FF2B5EF4-FFF2-40B4-BE49-F238E27FC236}">
+                <a16:creationId xmlns:a16="http://schemas.microsoft.com/office/drawing/2014/main" id="{81BBA5EC-739B-62E8-2DEF-963F44D30A52}"/>
+              </a:ext>
+            </a:extLst>
+          </p:cNvPr>
+          <p:cNvPicPr>
+            <a:picLocks noChangeAspect="1"/>
+          </p:cNvPicPr>
+          <p:nvPr/>
+        </p:nvPicPr>
+        <p:blipFill>
+          <a:blip r:embed="rId2"/>
+          <a:stretch>
+            <a:fillRect/>
+          </a:stretch>
+        </p:blipFill>
+        <p:spPr>
+          <a:xfrm>
+            <a:off x="3419101" y="1323681"/>
+            <a:ext cx="5353797" cy="4210638"/>
+          </a:xfrm>
+          <a:prstGeom prst="rect">
+            <a:avLst/>
+          </a:prstGeom>
+        </p:spPr>
+      </p:pic>
     </p:spTree>
     <p:extLst>
       <p:ext uri="{BB962C8B-B14F-4D97-AF65-F5344CB8AC3E}">
@@ -3398,6 +3464,561 @@
 </file>
 
 <file path=ppt/slides/slide2.xml><?xml version="1.0" encoding="utf-8"?>
+<p:sld xmlns:a="http://schemas.openxmlformats.org/drawingml/2006/main" xmlns:r="http://schemas.openxmlformats.org/officeDocument/2006/relationships" xmlns:p="http://schemas.openxmlformats.org/presentationml/2006/main">
+  <p:cSld>
+    <p:spTree>
+      <p:nvGrpSpPr>
+        <p:cNvPr id="1" name="">
+          <a:extLst>
+            <a:ext uri="{FF2B5EF4-FFF2-40B4-BE49-F238E27FC236}">
+              <a16:creationId xmlns:a16="http://schemas.microsoft.com/office/drawing/2014/main" id="{139CC57A-94D7-F7E9-9097-2E6A64D723E1}"/>
+            </a:ext>
+          </a:extLst>
+        </p:cNvPr>
+        <p:cNvGrpSpPr/>
+        <p:nvPr/>
+      </p:nvGrpSpPr>
+      <p:grpSpPr>
+        <a:xfrm>
+          <a:off x="0" y="0"/>
+          <a:ext cx="0" cy="0"/>
+          <a:chOff x="0" y="0"/>
+          <a:chExt cx="0" cy="0"/>
+        </a:xfrm>
+      </p:grpSpPr>
+      <p:sp>
+        <p:nvSpPr>
+          <p:cNvPr id="3" name="TextBox 2">
+            <a:extLst>
+              <a:ext uri="{FF2B5EF4-FFF2-40B4-BE49-F238E27FC236}">
+                <a16:creationId xmlns:a16="http://schemas.microsoft.com/office/drawing/2014/main" id="{EDB7878A-311D-2ED3-7DF7-1C11CD0C213D}"/>
+              </a:ext>
+            </a:extLst>
+          </p:cNvPr>
+          <p:cNvSpPr txBox="1"/>
+          <p:nvPr/>
+        </p:nvSpPr>
+        <p:spPr>
+          <a:xfrm>
+            <a:off x="217714" y="255046"/>
+            <a:ext cx="11756571" cy="355354"/>
+          </a:xfrm>
+          <a:prstGeom prst="rect">
+            <a:avLst/>
+          </a:prstGeom>
+          <a:noFill/>
+        </p:spPr>
+        <p:txBody>
+          <a:bodyPr wrap="square">
+            <a:spAutoFit/>
+          </a:bodyPr>
+          <a:lstStyle/>
+          <a:p>
+            <a:pPr>
+              <a:lnSpc>
+                <a:spcPct val="150000"/>
+              </a:lnSpc>
+              <a:buNone/>
+            </a:pPr>
+            <a:r>
+              <a:rPr lang="en-US" altLang="en-US" sz="1300">
+                <a:latin typeface="Arial" panose="020B0604020202020204" pitchFamily="34" charset="0"/>
+              </a:rPr>
+              <a:t>app\DataTables\ProductVariantItemDataTable.php</a:t>
+            </a:r>
+            <a:endParaRPr kumimoji="0" lang="en-US" altLang="en-US" sz="1300" b="0" i="0" u="none" strike="noStrike" cap="none" normalizeH="0" baseline="0">
+              <a:ln>
+                <a:noFill/>
+              </a:ln>
+              <a:solidFill>
+                <a:schemeClr val="tx1"/>
+              </a:solidFill>
+              <a:effectLst/>
+              <a:latin typeface="Arial" panose="020B0604020202020204" pitchFamily="34" charset="0"/>
+            </a:endParaRPr>
+          </a:p>
+        </p:txBody>
+      </p:sp>
+      <p:grpSp>
+        <p:nvGrpSpPr>
+          <p:cNvPr id="6" name="Group 5">
+            <a:extLst>
+              <a:ext uri="{FF2B5EF4-FFF2-40B4-BE49-F238E27FC236}">
+                <a16:creationId xmlns:a16="http://schemas.microsoft.com/office/drawing/2014/main" id="{67677141-AE06-7B4D-B972-E799A4D6E81A}"/>
+              </a:ext>
+            </a:extLst>
+          </p:cNvPr>
+          <p:cNvGrpSpPr/>
+          <p:nvPr/>
+        </p:nvGrpSpPr>
+        <p:grpSpPr>
+          <a:xfrm>
+            <a:off x="5135628" y="0"/>
+            <a:ext cx="7056372" cy="6858000"/>
+            <a:chOff x="5135628" y="0"/>
+            <a:chExt cx="7056372" cy="6858000"/>
+          </a:xfrm>
+        </p:grpSpPr>
+        <p:pic>
+          <p:nvPicPr>
+            <p:cNvPr id="4" name="Picture 3">
+              <a:extLst>
+                <a:ext uri="{FF2B5EF4-FFF2-40B4-BE49-F238E27FC236}">
+                  <a16:creationId xmlns:a16="http://schemas.microsoft.com/office/drawing/2014/main" id="{1A747CB2-4180-90EA-B861-7BA9E9D177ED}"/>
+                </a:ext>
+              </a:extLst>
+            </p:cNvPr>
+            <p:cNvPicPr>
+              <a:picLocks noChangeAspect="1"/>
+            </p:cNvPicPr>
+            <p:nvPr/>
+          </p:nvPicPr>
+          <p:blipFill>
+            <a:blip r:embed="rId2"/>
+            <a:stretch>
+              <a:fillRect/>
+            </a:stretch>
+          </p:blipFill>
+          <p:spPr>
+            <a:xfrm>
+              <a:off x="5135628" y="0"/>
+              <a:ext cx="7056372" cy="6858000"/>
+            </a:xfrm>
+            <a:prstGeom prst="rect">
+              <a:avLst/>
+            </a:prstGeom>
+          </p:spPr>
+        </p:pic>
+        <mc:AlternateContent xmlns:mc="http://schemas.openxmlformats.org/markup-compatibility/2006">
+          <mc:Choice xmlns:p14="http://schemas.microsoft.com/office/powerpoint/2010/main" Requires="p14">
+            <p:contentPart p14:bwMode="auto" r:id="rId3">
+              <p14:nvContentPartPr>
+                <p14:cNvPr id="5" name="Ink 4">
+                  <a:extLst>
+                    <a:ext uri="{FF2B5EF4-FFF2-40B4-BE49-F238E27FC236}">
+                      <a16:creationId xmlns:a16="http://schemas.microsoft.com/office/drawing/2014/main" id="{C39E6851-7D73-8505-1533-BBEFF2F34AB9}"/>
+                    </a:ext>
+                  </a:extLst>
+                </p14:cNvPr>
+                <p14:cNvContentPartPr/>
+                <p14:nvPr/>
+              </p14:nvContentPartPr>
+              <p14:xfrm>
+                <a:off x="9004713" y="4413058"/>
+                <a:ext cx="1683360" cy="1748520"/>
+              </p14:xfrm>
+            </p:contentPart>
+          </mc:Choice>
+          <mc:Fallback>
+            <p:pic>
+              <p:nvPicPr>
+                <p:cNvPr id="5" name="Ink 4">
+                  <a:extLst>
+                    <a:ext uri="{FF2B5EF4-FFF2-40B4-BE49-F238E27FC236}">
+                      <a16:creationId xmlns:a16="http://schemas.microsoft.com/office/drawing/2014/main" id="{C39E6851-7D73-8505-1533-BBEFF2F34AB9}"/>
+                    </a:ext>
+                  </a:extLst>
+                </p:cNvPr>
+                <p:cNvPicPr/>
+                <p:nvPr/>
+              </p:nvPicPr>
+              <p:blipFill>
+                <a:blip r:embed="rId4"/>
+                <a:stretch>
+                  <a:fillRect/>
+                </a:stretch>
+              </p:blipFill>
+              <p:spPr>
+                <a:xfrm>
+                  <a:off x="8998593" y="4406938"/>
+                  <a:ext cx="1695600" cy="1760760"/>
+                </a:xfrm>
+                <a:prstGeom prst="rect">
+                  <a:avLst/>
+                </a:prstGeom>
+              </p:spPr>
+            </p:pic>
+          </mc:Fallback>
+        </mc:AlternateContent>
+      </p:grpSp>
+    </p:spTree>
+    <p:extLst>
+      <p:ext uri="{BB962C8B-B14F-4D97-AF65-F5344CB8AC3E}">
+        <p14:creationId xmlns:p14="http://schemas.microsoft.com/office/powerpoint/2010/main" val="3977955899"/>
+      </p:ext>
+    </p:extLst>
+  </p:cSld>
+  <p:clrMapOvr>
+    <a:masterClrMapping/>
+  </p:clrMapOvr>
+</p:sld>
+</file>
+
+<file path=ppt/slides/slide3.xml><?xml version="1.0" encoding="utf-8"?>
+<p:sld xmlns:a="http://schemas.openxmlformats.org/drawingml/2006/main" xmlns:r="http://schemas.openxmlformats.org/officeDocument/2006/relationships" xmlns:p="http://schemas.openxmlformats.org/presentationml/2006/main">
+  <p:cSld>
+    <p:spTree>
+      <p:nvGrpSpPr>
+        <p:cNvPr id="1" name="">
+          <a:extLst>
+            <a:ext uri="{FF2B5EF4-FFF2-40B4-BE49-F238E27FC236}">
+              <a16:creationId xmlns:a16="http://schemas.microsoft.com/office/drawing/2014/main" id="{2D6F06A2-5388-E785-F46F-F541C1E0A0F9}"/>
+            </a:ext>
+          </a:extLst>
+        </p:cNvPr>
+        <p:cNvGrpSpPr/>
+        <p:nvPr/>
+      </p:nvGrpSpPr>
+      <p:grpSpPr>
+        <a:xfrm>
+          <a:off x="0" y="0"/>
+          <a:ext cx="0" cy="0"/>
+          <a:chOff x="0" y="0"/>
+          <a:chExt cx="0" cy="0"/>
+        </a:xfrm>
+      </p:grpSpPr>
+      <p:sp>
+        <p:nvSpPr>
+          <p:cNvPr id="3" name="TextBox 2">
+            <a:extLst>
+              <a:ext uri="{FF2B5EF4-FFF2-40B4-BE49-F238E27FC236}">
+                <a16:creationId xmlns:a16="http://schemas.microsoft.com/office/drawing/2014/main" id="{4C39A5AD-FD35-B2A2-00C3-42C3F608CCDA}"/>
+              </a:ext>
+            </a:extLst>
+          </p:cNvPr>
+          <p:cNvSpPr txBox="1"/>
+          <p:nvPr/>
+        </p:nvSpPr>
+        <p:spPr>
+          <a:xfrm>
+            <a:off x="217714" y="255046"/>
+            <a:ext cx="11756571" cy="355354"/>
+          </a:xfrm>
+          <a:prstGeom prst="rect">
+            <a:avLst/>
+          </a:prstGeom>
+          <a:noFill/>
+        </p:spPr>
+        <p:txBody>
+          <a:bodyPr wrap="square">
+            <a:spAutoFit/>
+          </a:bodyPr>
+          <a:lstStyle/>
+          <a:p>
+            <a:pPr>
+              <a:lnSpc>
+                <a:spcPct val="150000"/>
+              </a:lnSpc>
+              <a:buNone/>
+            </a:pPr>
+            <a:r>
+              <a:rPr kumimoji="0" lang="en-US" altLang="en-US" sz="1300" b="0" i="0" u="none" strike="noStrike" cap="none" normalizeH="0" baseline="0">
+                <a:ln>
+                  <a:noFill/>
+                </a:ln>
+                <a:solidFill>
+                  <a:schemeClr val="tx1"/>
+                </a:solidFill>
+                <a:effectLst/>
+                <a:latin typeface="Arial" panose="020B0604020202020204" pitchFamily="34" charset="0"/>
+              </a:rPr>
+              <a:t>.</a:t>
+            </a:r>
+          </a:p>
+        </p:txBody>
+      </p:sp>
+      <p:pic>
+        <p:nvPicPr>
+          <p:cNvPr id="4" name="Picture 3">
+            <a:extLst>
+              <a:ext uri="{FF2B5EF4-FFF2-40B4-BE49-F238E27FC236}">
+                <a16:creationId xmlns:a16="http://schemas.microsoft.com/office/drawing/2014/main" id="{17436072-74D6-3A5C-AE46-9FA320BF6D37}"/>
+              </a:ext>
+            </a:extLst>
+          </p:cNvPr>
+          <p:cNvPicPr>
+            <a:picLocks noChangeAspect="1"/>
+          </p:cNvPicPr>
+          <p:nvPr/>
+        </p:nvPicPr>
+        <p:blipFill>
+          <a:blip r:embed="rId2"/>
+          <a:stretch>
+            <a:fillRect/>
+          </a:stretch>
+        </p:blipFill>
+        <p:spPr>
+          <a:xfrm>
+            <a:off x="0" y="1476748"/>
+            <a:ext cx="12192000" cy="3904503"/>
+          </a:xfrm>
+          <a:prstGeom prst="rect">
+            <a:avLst/>
+          </a:prstGeom>
+          <a:ln>
+            <a:noFill/>
+          </a:ln>
+          <a:effectLst>
+            <a:outerShdw blurRad="292100" dist="139700" dir="2700000" algn="tl" rotWithShape="0">
+              <a:srgbClr val="333333">
+                <a:alpha val="65000"/>
+              </a:srgbClr>
+            </a:outerShdw>
+          </a:effectLst>
+        </p:spPr>
+      </p:pic>
+    </p:spTree>
+    <p:extLst>
+      <p:ext uri="{BB962C8B-B14F-4D97-AF65-F5344CB8AC3E}">
+        <p14:creationId xmlns:p14="http://schemas.microsoft.com/office/powerpoint/2010/main" val="3953931861"/>
+      </p:ext>
+    </p:extLst>
+  </p:cSld>
+  <p:clrMapOvr>
+    <a:masterClrMapping/>
+  </p:clrMapOvr>
+</p:sld>
+</file>
+
+<file path=ppt/slides/slide4.xml><?xml version="1.0" encoding="utf-8"?>
+<p:sld xmlns:a="http://schemas.openxmlformats.org/drawingml/2006/main" xmlns:r="http://schemas.openxmlformats.org/officeDocument/2006/relationships" xmlns:p="http://schemas.openxmlformats.org/presentationml/2006/main">
+  <p:cSld>
+    <p:spTree>
+      <p:nvGrpSpPr>
+        <p:cNvPr id="1" name="">
+          <a:extLst>
+            <a:ext uri="{FF2B5EF4-FFF2-40B4-BE49-F238E27FC236}">
+              <a16:creationId xmlns:a16="http://schemas.microsoft.com/office/drawing/2014/main" id="{CC6B177F-92A2-423F-6BB8-3B3303465D67}"/>
+            </a:ext>
+          </a:extLst>
+        </p:cNvPr>
+        <p:cNvGrpSpPr/>
+        <p:nvPr/>
+      </p:nvGrpSpPr>
+      <p:grpSpPr>
+        <a:xfrm>
+          <a:off x="0" y="0"/>
+          <a:ext cx="0" cy="0"/>
+          <a:chOff x="0" y="0"/>
+          <a:chExt cx="0" cy="0"/>
+        </a:xfrm>
+      </p:grpSpPr>
+      <p:sp>
+        <p:nvSpPr>
+          <p:cNvPr id="3" name="TextBox 2">
+            <a:extLst>
+              <a:ext uri="{FF2B5EF4-FFF2-40B4-BE49-F238E27FC236}">
+                <a16:creationId xmlns:a16="http://schemas.microsoft.com/office/drawing/2014/main" id="{9C43B4B7-EB77-31C9-F39F-E19C64D3A2E2}"/>
+              </a:ext>
+            </a:extLst>
+          </p:cNvPr>
+          <p:cNvSpPr txBox="1"/>
+          <p:nvPr/>
+        </p:nvSpPr>
+        <p:spPr>
+          <a:xfrm>
+            <a:off x="217714" y="255046"/>
+            <a:ext cx="11756571" cy="355354"/>
+          </a:xfrm>
+          <a:prstGeom prst="rect">
+            <a:avLst/>
+          </a:prstGeom>
+          <a:noFill/>
+        </p:spPr>
+        <p:txBody>
+          <a:bodyPr wrap="square">
+            <a:spAutoFit/>
+          </a:bodyPr>
+          <a:lstStyle/>
+          <a:p>
+            <a:pPr>
+              <a:lnSpc>
+                <a:spcPct val="150000"/>
+              </a:lnSpc>
+              <a:buNone/>
+            </a:pPr>
+            <a:r>
+              <a:rPr lang="en-US" altLang="en-US" sz="1300">
+                <a:latin typeface="Arial" panose="020B0604020202020204" pitchFamily="34" charset="0"/>
+              </a:rPr>
+              <a:t>app\DataTables\ProductVariantItemDataTable.php</a:t>
+            </a:r>
+            <a:endParaRPr kumimoji="0" lang="en-US" altLang="en-US" sz="1300" b="0" i="0" u="none" strike="noStrike" cap="none" normalizeH="0" baseline="0">
+              <a:ln>
+                <a:noFill/>
+              </a:ln>
+              <a:solidFill>
+                <a:schemeClr val="tx1"/>
+              </a:solidFill>
+              <a:effectLst/>
+              <a:latin typeface="Arial" panose="020B0604020202020204" pitchFamily="34" charset="0"/>
+            </a:endParaRPr>
+          </a:p>
+        </p:txBody>
+      </p:sp>
+      <p:pic>
+        <p:nvPicPr>
+          <p:cNvPr id="8" name="Picture 7">
+            <a:extLst>
+              <a:ext uri="{FF2B5EF4-FFF2-40B4-BE49-F238E27FC236}">
+                <a16:creationId xmlns:a16="http://schemas.microsoft.com/office/drawing/2014/main" id="{2E34E0E1-597E-AD6E-87D4-27F49B6639D3}"/>
+              </a:ext>
+            </a:extLst>
+          </p:cNvPr>
+          <p:cNvPicPr>
+            <a:picLocks noChangeAspect="1"/>
+          </p:cNvPicPr>
+          <p:nvPr/>
+        </p:nvPicPr>
+        <p:blipFill>
+          <a:blip r:embed="rId2"/>
+          <a:stretch>
+            <a:fillRect/>
+          </a:stretch>
+        </p:blipFill>
+        <p:spPr>
+          <a:xfrm>
+            <a:off x="7543139" y="0"/>
+            <a:ext cx="4648861" cy="6858000"/>
+          </a:xfrm>
+          <a:prstGeom prst="rect">
+            <a:avLst/>
+          </a:prstGeom>
+        </p:spPr>
+      </p:pic>
+    </p:spTree>
+    <p:extLst>
+      <p:ext uri="{BB962C8B-B14F-4D97-AF65-F5344CB8AC3E}">
+        <p14:creationId xmlns:p14="http://schemas.microsoft.com/office/powerpoint/2010/main" val="2579675695"/>
+      </p:ext>
+    </p:extLst>
+  </p:cSld>
+  <p:clrMapOvr>
+    <a:masterClrMapping/>
+  </p:clrMapOvr>
+</p:sld>
+</file>
+
+<file path=ppt/slides/slide5.xml><?xml version="1.0" encoding="utf-8"?>
+<p:sld xmlns:a="http://schemas.openxmlformats.org/drawingml/2006/main" xmlns:r="http://schemas.openxmlformats.org/officeDocument/2006/relationships" xmlns:p="http://schemas.openxmlformats.org/presentationml/2006/main">
+  <p:cSld>
+    <p:spTree>
+      <p:nvGrpSpPr>
+        <p:cNvPr id="1" name="">
+          <a:extLst>
+            <a:ext uri="{FF2B5EF4-FFF2-40B4-BE49-F238E27FC236}">
+              <a16:creationId xmlns:a16="http://schemas.microsoft.com/office/drawing/2014/main" id="{D1DFCBA4-1230-6128-2B7C-F21EE431EC5B}"/>
+            </a:ext>
+          </a:extLst>
+        </p:cNvPr>
+        <p:cNvGrpSpPr/>
+        <p:nvPr/>
+      </p:nvGrpSpPr>
+      <p:grpSpPr>
+        <a:xfrm>
+          <a:off x="0" y="0"/>
+          <a:ext cx="0" cy="0"/>
+          <a:chOff x="0" y="0"/>
+          <a:chExt cx="0" cy="0"/>
+        </a:xfrm>
+      </p:grpSpPr>
+      <p:sp>
+        <p:nvSpPr>
+          <p:cNvPr id="3" name="TextBox 2">
+            <a:extLst>
+              <a:ext uri="{FF2B5EF4-FFF2-40B4-BE49-F238E27FC236}">
+                <a16:creationId xmlns:a16="http://schemas.microsoft.com/office/drawing/2014/main" id="{808688CD-D0D1-60DD-6ED5-B213D7E6D9DE}"/>
+              </a:ext>
+            </a:extLst>
+          </p:cNvPr>
+          <p:cNvSpPr txBox="1"/>
+          <p:nvPr/>
+        </p:nvSpPr>
+        <p:spPr>
+          <a:xfrm>
+            <a:off x="0" y="162683"/>
+            <a:ext cx="11756571" cy="314894"/>
+          </a:xfrm>
+          <a:prstGeom prst="rect">
+            <a:avLst/>
+          </a:prstGeom>
+          <a:noFill/>
+        </p:spPr>
+        <p:txBody>
+          <a:bodyPr wrap="square">
+            <a:spAutoFit/>
+          </a:bodyPr>
+          <a:lstStyle/>
+          <a:p>
+            <a:pPr>
+              <a:lnSpc>
+                <a:spcPct val="150000"/>
+              </a:lnSpc>
+              <a:buNone/>
+            </a:pPr>
+            <a:r>
+              <a:rPr lang="en-US" altLang="en-US" sz="1100">
+                <a:latin typeface="Arial" panose="020B0604020202020204" pitchFamily="34" charset="0"/>
+              </a:rPr>
+              <a:t>app\DataTables\ProductVariantItemDataTable.php</a:t>
+            </a:r>
+            <a:endParaRPr kumimoji="0" lang="en-US" altLang="en-US" sz="1100" b="0" i="0" u="none" strike="noStrike" cap="none" normalizeH="0" baseline="0">
+              <a:ln>
+                <a:noFill/>
+              </a:ln>
+              <a:solidFill>
+                <a:schemeClr val="tx1"/>
+              </a:solidFill>
+              <a:effectLst/>
+              <a:latin typeface="Arial" panose="020B0604020202020204" pitchFamily="34" charset="0"/>
+            </a:endParaRPr>
+          </a:p>
+        </p:txBody>
+      </p:sp>
+      <p:pic>
+        <p:nvPicPr>
+          <p:cNvPr id="4" name="Picture 3">
+            <a:extLst>
+              <a:ext uri="{FF2B5EF4-FFF2-40B4-BE49-F238E27FC236}">
+                <a16:creationId xmlns:a16="http://schemas.microsoft.com/office/drawing/2014/main" id="{99721810-4195-D5C1-9012-A8CD48765069}"/>
+              </a:ext>
+            </a:extLst>
+          </p:cNvPr>
+          <p:cNvPicPr>
+            <a:picLocks noChangeAspect="1"/>
+          </p:cNvPicPr>
+          <p:nvPr/>
+        </p:nvPicPr>
+        <p:blipFill>
+          <a:blip r:embed="rId2"/>
+          <a:stretch>
+            <a:fillRect/>
+          </a:stretch>
+        </p:blipFill>
+        <p:spPr>
+          <a:xfrm>
+            <a:off x="3595449" y="0"/>
+            <a:ext cx="8596551" cy="6858000"/>
+          </a:xfrm>
+          <a:prstGeom prst="rect">
+            <a:avLst/>
+          </a:prstGeom>
+        </p:spPr>
+      </p:pic>
+    </p:spTree>
+    <p:extLst>
+      <p:ext uri="{BB962C8B-B14F-4D97-AF65-F5344CB8AC3E}">
+        <p14:creationId xmlns:p14="http://schemas.microsoft.com/office/powerpoint/2010/main" val="3044539600"/>
+      </p:ext>
+    </p:extLst>
+  </p:cSld>
+  <p:clrMapOvr>
+    <a:masterClrMapping/>
+  </p:clrMapOvr>
+</p:sld>
+</file>
+
+<file path=ppt/slides/slide6.xml><?xml version="1.0" encoding="utf-8"?>
 <p:sld xmlns:a="http://schemas.openxmlformats.org/drawingml/2006/main" xmlns:r="http://schemas.openxmlformats.org/officeDocument/2006/relationships" xmlns:p="http://schemas.openxmlformats.org/presentationml/2006/main">
   <p:cSld>
     <p:spTree>
@@ -3470,6 +4091,36 @@
           </a:p>
         </p:txBody>
       </p:sp>
+      <p:pic>
+        <p:nvPicPr>
+          <p:cNvPr id="4" name="Picture 3">
+            <a:extLst>
+              <a:ext uri="{FF2B5EF4-FFF2-40B4-BE49-F238E27FC236}">
+                <a16:creationId xmlns:a16="http://schemas.microsoft.com/office/drawing/2014/main" id="{1E1D9057-9BB4-19DC-DAB4-B5688117F668}"/>
+              </a:ext>
+            </a:extLst>
+          </p:cNvPr>
+          <p:cNvPicPr>
+            <a:picLocks noChangeAspect="1"/>
+          </p:cNvPicPr>
+          <p:nvPr/>
+        </p:nvPicPr>
+        <p:blipFill>
+          <a:blip r:embed="rId2"/>
+          <a:stretch>
+            <a:fillRect/>
+          </a:stretch>
+        </p:blipFill>
+        <p:spPr>
+          <a:xfrm>
+            <a:off x="1360181" y="0"/>
+            <a:ext cx="9471636" cy="6858000"/>
+          </a:xfrm>
+          <a:prstGeom prst="rect">
+            <a:avLst/>
+          </a:prstGeom>
+        </p:spPr>
+      </p:pic>
     </p:spTree>
     <p:extLst>
       <p:ext uri="{BB962C8B-B14F-4D97-AF65-F5344CB8AC3E}">
@@ -3483,7 +4134,133 @@
 </p:sld>
 </file>
 
-<file path=ppt/slides/slide3.xml><?xml version="1.0" encoding="utf-8"?>
+<file path=ppt/slides/slide7.xml><?xml version="1.0" encoding="utf-8"?>
+<p:sld xmlns:a="http://schemas.openxmlformats.org/drawingml/2006/main" xmlns:r="http://schemas.openxmlformats.org/officeDocument/2006/relationships" xmlns:p="http://schemas.openxmlformats.org/presentationml/2006/main">
+  <p:cSld>
+    <p:spTree>
+      <p:nvGrpSpPr>
+        <p:cNvPr id="1" name="">
+          <a:extLst>
+            <a:ext uri="{FF2B5EF4-FFF2-40B4-BE49-F238E27FC236}">
+              <a16:creationId xmlns:a16="http://schemas.microsoft.com/office/drawing/2014/main" id="{611BA235-5C5C-AA40-692C-19FCBCF2B592}"/>
+            </a:ext>
+          </a:extLst>
+        </p:cNvPr>
+        <p:cNvGrpSpPr/>
+        <p:nvPr/>
+      </p:nvGrpSpPr>
+      <p:grpSpPr>
+        <a:xfrm>
+          <a:off x="0" y="0"/>
+          <a:ext cx="0" cy="0"/>
+          <a:chOff x="0" y="0"/>
+          <a:chExt cx="0" cy="0"/>
+        </a:xfrm>
+      </p:grpSpPr>
+      <p:sp>
+        <p:nvSpPr>
+          <p:cNvPr id="3" name="TextBox 2">
+            <a:extLst>
+              <a:ext uri="{FF2B5EF4-FFF2-40B4-BE49-F238E27FC236}">
+                <a16:creationId xmlns:a16="http://schemas.microsoft.com/office/drawing/2014/main" id="{4573BE06-FCE4-99F1-1FB4-DEAF11A5AD11}"/>
+              </a:ext>
+            </a:extLst>
+          </p:cNvPr>
+          <p:cNvSpPr txBox="1"/>
+          <p:nvPr/>
+        </p:nvSpPr>
+        <p:spPr>
+          <a:xfrm>
+            <a:off x="217714" y="255046"/>
+            <a:ext cx="11756571" cy="355354"/>
+          </a:xfrm>
+          <a:prstGeom prst="rect">
+            <a:avLst/>
+          </a:prstGeom>
+          <a:noFill/>
+        </p:spPr>
+        <p:txBody>
+          <a:bodyPr wrap="square">
+            <a:spAutoFit/>
+          </a:bodyPr>
+          <a:lstStyle/>
+          <a:p>
+            <a:pPr>
+              <a:lnSpc>
+                <a:spcPct val="150000"/>
+              </a:lnSpc>
+              <a:buNone/>
+            </a:pPr>
+            <a:r>
+              <a:rPr kumimoji="0" lang="en-US" altLang="en-US" sz="1300" b="0" i="0" u="none" strike="noStrike" cap="none" normalizeH="0" baseline="0">
+                <a:ln>
+                  <a:noFill/>
+                </a:ln>
+                <a:solidFill>
+                  <a:schemeClr val="tx1"/>
+                </a:solidFill>
+                <a:effectLst/>
+                <a:latin typeface="Arial" panose="020B0604020202020204" pitchFamily="34" charset="0"/>
+              </a:rPr>
+              <a:t>.</a:t>
+            </a:r>
+          </a:p>
+        </p:txBody>
+      </p:sp>
+      <p:pic>
+        <p:nvPicPr>
+          <p:cNvPr id="4" name="Picture 3">
+            <a:extLst>
+              <a:ext uri="{FF2B5EF4-FFF2-40B4-BE49-F238E27FC236}">
+                <a16:creationId xmlns:a16="http://schemas.microsoft.com/office/drawing/2014/main" id="{E5CCA88D-9E64-1632-A4FB-8E55E77F0B1E}"/>
+              </a:ext>
+            </a:extLst>
+          </p:cNvPr>
+          <p:cNvPicPr>
+            <a:picLocks noChangeAspect="1"/>
+          </p:cNvPicPr>
+          <p:nvPr/>
+        </p:nvPicPr>
+        <p:blipFill>
+          <a:blip r:embed="rId2"/>
+          <a:stretch>
+            <a:fillRect/>
+          </a:stretch>
+        </p:blipFill>
+        <p:spPr>
+          <a:xfrm>
+            <a:off x="0" y="1455914"/>
+            <a:ext cx="12192000" cy="3946172"/>
+          </a:xfrm>
+          <a:prstGeom prst="rect">
+            <a:avLst/>
+          </a:prstGeom>
+          <a:ln>
+            <a:noFill/>
+          </a:ln>
+          <a:effectLst>
+            <a:outerShdw blurRad="292100" dist="139700" dir="2700000" algn="tl" rotWithShape="0">
+              <a:srgbClr val="333333">
+                <a:alpha val="65000"/>
+              </a:srgbClr>
+            </a:outerShdw>
+          </a:effectLst>
+        </p:spPr>
+      </p:pic>
+    </p:spTree>
+    <p:extLst>
+      <p:ext uri="{BB962C8B-B14F-4D97-AF65-F5344CB8AC3E}">
+        <p14:creationId xmlns:p14="http://schemas.microsoft.com/office/powerpoint/2010/main" val="2868567831"/>
+      </p:ext>
+    </p:extLst>
+  </p:cSld>
+  <p:clrMapOvr>
+    <a:masterClrMapping/>
+  </p:clrMapOvr>
+</p:sld>
+</file>
+
+<file path=ppt/slides/slide8.xml><?xml version="1.0" encoding="utf-8"?>
 <p:sld xmlns:a="http://schemas.openxmlformats.org/drawingml/2006/main" xmlns:r="http://schemas.openxmlformats.org/officeDocument/2006/relationships" xmlns:p="http://schemas.openxmlformats.org/presentationml/2006/main">
   <p:cSld>
     <p:spTree>
